--- a/classes/parte-12-osint-e-ingenieria-social/256-fundamentos-de-ingenieria-social/clase-256-presentacion.pptx
+++ b/classes/parte-12-osint-e-ingenieria-social/256-fundamentos-de-ingenieria-social/clase-256-presentacion.pptx
@@ -18,6 +18,10 @@
     <p:sldId id="266" r:id="rId17"/>
     <p:sldId id="267" r:id="rId18"/>
     <p:sldId id="268" r:id="rId19"/>
+    <p:sldId id="269" r:id="rId20"/>
+    <p:sldId id="270" r:id="rId21"/>
+    <p:sldId id="271" r:id="rId22"/>
+    <p:sldId id="272" r:id="rId23"/>
   </p:sldIdLst>
   <p:sldSz cx="9144000" cy="6858000" type="screen4x3"/>
   <p:notesSz cx="6858000" cy="9144000"/>
@@ -3199,7 +3203,7 @@
                   <a:srgbClr val="0B3D2E"/>
                 </a:solidFill>
               </a:rPr>
-              <a:t>📝 Reto verificable</a:t>
+              <a:t>🧰 Herramientas y preparación</a:t>
             </a:r>
           </a:p>
         </p:txBody>
@@ -3237,52 +3241,67 @@
                   <a:srgbClr val="22282E"/>
                 </a:solidFill>
               </a:rPr>
-              <a:t>•  Entrega un plan de simulacro de ingeniería social autorizado: objetivos, vectores, pretexto</a:t>
-            </a:r>
-          </a:p>
-          <a:p>
-            <a:pPr>
-              <a:spcAft>
-                <a:spcPts val="600"/>
-              </a:spcAft>
-            </a:pPr>
-            <a:r>
-              <a:rPr sz="1500">
-                <a:solidFill>
-                  <a:srgbClr val="22282E"/>
-                </a:solidFill>
-              </a:rPr>
-              <a:t>•  ético, Rules of Engagement, métricas defensivas y plan de escalado.</a:t>
-            </a:r>
-          </a:p>
-          <a:p>
-            <a:pPr>
-              <a:spcAft>
-                <a:spcPts val="600"/>
-              </a:spcAft>
-            </a:pPr>
-            <a:r>
-              <a:rPr sz="1500">
-                <a:solidFill>
-                  <a:srgbClr val="22282E"/>
-                </a:solidFill>
-              </a:rPr>
-              <a:t>•  Criterio de aceptación: el plan incluye autorización explícita, límites claros ("qué no se hará"),</a:t>
-            </a:r>
-          </a:p>
-          <a:p>
-            <a:pPr>
-              <a:spcAft>
-                <a:spcPts val="600"/>
-              </a:spcAft>
-            </a:pPr>
-            <a:r>
-              <a:rPr sz="1500">
-                <a:solidFill>
-                  <a:srgbClr val="22282E"/>
-                </a:solidFill>
-              </a:rPr>
-              <a:t>•  protección de las personas y métricas orientadas a mejorar la defensa.</a:t>
+              <a:t>•  Marco documental: plantilla de Rules of Engagement (alcance, objetivos, límites, escalado) y autorización firmada.</a:t>
+            </a:r>
+          </a:p>
+          <a:p>
+            <a:pPr>
+              <a:spcAft>
+                <a:spcPts val="600"/>
+              </a:spcAft>
+            </a:pPr>
+            <a:r>
+              <a:rPr sz="1500">
+                <a:solidFill>
+                  <a:srgbClr val="22282E"/>
+                </a:solidFill>
+              </a:rPr>
+              <a:t>•  Fuentes de estudio: libros de Hadnagy y Cialdini (referencia, no copia); casos públicos de la SECBAG/DEF CON SECTF.</a:t>
+            </a:r>
+          </a:p>
+          <a:p>
+            <a:pPr>
+              <a:spcAft>
+                <a:spcPts val="600"/>
+              </a:spcAft>
+            </a:pPr>
+            <a:r>
+              <a:rPr sz="1500">
+                <a:solidFill>
+                  <a:srgbClr val="22282E"/>
+                </a:solidFill>
+              </a:rPr>
+              <a:t>•  Registro: diario de operación para documentar cada interacción de un simulacro autorizado.</a:t>
+            </a:r>
+          </a:p>
+          <a:p>
+            <a:pPr>
+              <a:spcAft>
+                <a:spcPts val="600"/>
+              </a:spcAft>
+            </a:pPr>
+            <a:r>
+              <a:rPr sz="1500">
+                <a:solidFill>
+                  <a:srgbClr val="22282E"/>
+                </a:solidFill>
+              </a:rPr>
+              <a:t>•  Este es un módulo conceptual: la práctica ofensiva real llega en 257–258, siempre autorizada.</a:t>
+            </a:r>
+          </a:p>
+          <a:p>
+            <a:pPr>
+              <a:spcAft>
+                <a:spcPts val="600"/>
+              </a:spcAft>
+            </a:pPr>
+            <a:r>
+              <a:rPr sz="1500">
+                <a:solidFill>
+                  <a:srgbClr val="22282E"/>
+                </a:solidFill>
+              </a:rPr>
+              <a:t>•  Recordatorio: sin permiso escrito no hay ejercicio ofensivo; aquí se estudia y se planifica.</a:t>
             </a:r>
           </a:p>
         </p:txBody>
@@ -3333,7 +3352,7 @@
                   <a:srgbClr val="0B3D2E"/>
                 </a:solidFill>
               </a:rPr>
-              <a:t>⚠️ Errores comunes</a:t>
+              <a:t>🧪 Laboratorio guiado (ejercicio aplicado)</a:t>
             </a:r>
           </a:p>
         </p:txBody>
@@ -3371,67 +3390,97 @@
                   <a:srgbClr val="22282E"/>
                 </a:solidFill>
               </a:rPr>
-              <a:t>•  Simulacro percibido como "trampa" hostil — Faltó enfoque educativo. Diseña para enseñar, no para humillar.</a:t>
-            </a:r>
-          </a:p>
-          <a:p>
-            <a:pPr>
-              <a:spcAft>
-                <a:spcPts val="600"/>
-              </a:spcAft>
-            </a:pPr>
-            <a:r>
-              <a:rPr sz="1500">
-                <a:solidFill>
-                  <a:srgbClr val="22282E"/>
-                </a:solidFill>
-              </a:rPr>
-              <a:t>•  Sin autorización escrita — Riesgo legal grave. Nunca ejecutes sin permiso firmado.</a:t>
-            </a:r>
-          </a:p>
-          <a:p>
-            <a:pPr>
-              <a:spcAft>
-                <a:spcPts val="600"/>
-              </a:spcAft>
-            </a:pPr>
-            <a:r>
-              <a:rPr sz="1500">
-                <a:solidFill>
-                  <a:srgbClr val="22282E"/>
-                </a:solidFill>
-              </a:rPr>
-              <a:t>•  Métrica solo de "clics" — Mide resiliencia: tasa de reporte y tiempo de detección también.</a:t>
-            </a:r>
-          </a:p>
-          <a:p>
-            <a:pPr>
-              <a:spcAft>
-                <a:spcPts val="600"/>
-              </a:spcAft>
-            </a:pPr>
-            <a:r>
-              <a:rPr sz="1500">
-                <a:solidFill>
-                  <a:srgbClr val="22282E"/>
-                </a:solidFill>
-              </a:rPr>
-              <a:t>•  Pretexto con datos reales de terceros — Riesgo de privacidad. Usa datos ficticios en pruebas de concienciación.</a:t>
-            </a:r>
-          </a:p>
-          <a:p>
-            <a:pPr>
-              <a:spcAft>
-                <a:spcPts val="600"/>
-              </a:spcAft>
-            </a:pPr>
-            <a:r>
-              <a:rPr sz="1500">
-                <a:solidFill>
-                  <a:srgbClr val="22282E"/>
-                </a:solidFill>
-              </a:rPr>
-              <a:t>•  Personas dañadas emocionalmente — No hubo plan de cuidado. Incluye escalado y debrief de apoyo.</a:t>
+              <a:t>•  Análisis de casos y diseño de un marco ético, sin manipular a nadie.</a:t>
+            </a:r>
+          </a:p>
+          <a:p>
+            <a:pPr>
+              <a:spcAft>
+                <a:spcPts val="600"/>
+              </a:spcAft>
+            </a:pPr>
+            <a:r>
+              <a:rPr sz="1500">
+                <a:solidFill>
+                  <a:srgbClr val="22282E"/>
+                </a:solidFill>
+              </a:rPr>
+              <a:t>•  Toma tres casos públicos de ingeniería social (p. ej. incidentes divulgados) y clasifica su vector.</a:t>
+            </a:r>
+          </a:p>
+          <a:p>
+            <a:pPr>
+              <a:spcAft>
+                <a:spcPts val="600"/>
+              </a:spcAft>
+            </a:pPr>
+            <a:r>
+              <a:rPr sz="1500">
+                <a:solidFill>
+                  <a:srgbClr val="22282E"/>
+                </a:solidFill>
+              </a:rPr>
+              <a:t>•  Para cada caso, identifica qué principios de Cialdini se explotaron y subráyalos.</a:t>
+            </a:r>
+          </a:p>
+          <a:p>
+            <a:pPr>
+              <a:spcAft>
+                <a:spcPts val="600"/>
+              </a:spcAft>
+            </a:pPr>
+            <a:r>
+              <a:rPr sz="1500">
+                <a:solidFill>
+                  <a:srgbClr val="22282E"/>
+                </a:solidFill>
+              </a:rPr>
+              <a:t>•  Reconstruye el ciclo de ataque: qué OSINT tuvieron, qué pretexto usaron, cómo ejecutaron y salieron.</a:t>
+            </a:r>
+          </a:p>
+          <a:p>
+            <a:pPr>
+              <a:spcAft>
+                <a:spcPts val="600"/>
+              </a:spcAft>
+            </a:pPr>
+            <a:r>
+              <a:rPr sz="1500">
+                <a:solidFill>
+                  <a:srgbClr val="22282E"/>
+                </a:solidFill>
+              </a:rPr>
+              <a:t>•  Redacta una plantilla de Rules of Engagement para un simulacro autorizado (alcance, límites, no-hacer).</a:t>
+            </a:r>
+          </a:p>
+          <a:p>
+            <a:pPr>
+              <a:spcAft>
+                <a:spcPts val="600"/>
+              </a:spcAft>
+            </a:pPr>
+            <a:r>
+              <a:rPr sz="1500">
+                <a:solidFill>
+                  <a:srgbClr val="22282E"/>
+                </a:solidFill>
+              </a:rPr>
+              <a:t>•  Diseña un pretexto ético de laboratorio para probar concienciación (sin datos reales de terceros).</a:t>
+            </a:r>
+          </a:p>
+          <a:p>
+            <a:pPr>
+              <a:spcAft>
+                <a:spcPts val="600"/>
+              </a:spcAft>
+            </a:pPr>
+            <a:r>
+              <a:rPr sz="1500">
+                <a:solidFill>
+                  <a:srgbClr val="22282E"/>
+                </a:solidFill>
+              </a:rPr>
+              <a:t>•  Define métricas de éxito defensivas: tasa de reporte, tiempo de detección, no solo "cuántos cayeron".</a:t>
             </a:r>
           </a:p>
         </p:txBody>
@@ -3482,7 +3531,7 @@
                   <a:srgbClr val="0B3D2E"/>
                 </a:solidFill>
               </a:rPr>
-              <a:t>❓ Preguntas frecuentes</a:t>
+              <a:t>✍️ Ejercicios</a:t>
             </a:r>
           </a:p>
         </p:txBody>
@@ -3520,97 +3569,82 @@
                   <a:srgbClr val="22282E"/>
                 </a:solidFill>
               </a:rPr>
-              <a:t>•  ❓ ¿La ingeniería social es "hacking"?</a:t>
-            </a:r>
-          </a:p>
-          <a:p>
-            <a:pPr>
-              <a:spcAft>
-                <a:spcPts val="600"/>
-              </a:spcAft>
-            </a:pPr>
-            <a:r>
-              <a:rPr sz="1500">
-                <a:solidFill>
-                  <a:srgbClr val="22282E"/>
-                </a:solidFill>
-              </a:rPr>
-              <a:t>•  Sí, es hacking del factor humano. No requiere exploits técnicos; explota psicología, y suele ser el</a:t>
-            </a:r>
-          </a:p>
-          <a:p>
-            <a:pPr>
-              <a:spcAft>
-                <a:spcPts val="600"/>
-              </a:spcAft>
-            </a:pPr>
-            <a:r>
-              <a:rPr sz="1500">
-                <a:solidFill>
-                  <a:srgbClr val="22282E"/>
-                </a:solidFill>
-              </a:rPr>
-              <a:t>•  camino más fácil al objetivo.</a:t>
-            </a:r>
-          </a:p>
-          <a:p>
-            <a:pPr>
-              <a:spcAft>
-                <a:spcPts val="600"/>
-              </a:spcAft>
-            </a:pPr>
-            <a:r>
-              <a:rPr sz="1500">
-                <a:solidFill>
-                  <a:srgbClr val="22282E"/>
-                </a:solidFill>
-              </a:rPr>
-              <a:t>•  ❓ ¿Por qué caen incluso personas técnicas?</a:t>
-            </a:r>
-          </a:p>
-          <a:p>
-            <a:pPr>
-              <a:spcAft>
-                <a:spcPts val="600"/>
-              </a:spcAft>
-            </a:pPr>
-            <a:r>
-              <a:rPr sz="1500">
-                <a:solidFill>
-                  <a:srgbClr val="22282E"/>
-                </a:solidFill>
-              </a:rPr>
-              <a:t>•  Porque los principios de influencia operan bajo el pensamiento rápido y emocional; el conocimiento</a:t>
-            </a:r>
-          </a:p>
-          <a:p>
-            <a:pPr>
-              <a:spcAft>
-                <a:spcPts val="600"/>
-              </a:spcAft>
-            </a:pPr>
-            <a:r>
-              <a:rPr sz="1500">
-                <a:solidFill>
-                  <a:srgbClr val="22282E"/>
-                </a:solidFill>
-              </a:rPr>
-              <a:t>•  técnico no inmuniza contra la urgencia o la autoridad.</a:t>
-            </a:r>
-          </a:p>
-          <a:p>
-            <a:pPr>
-              <a:spcAft>
-                <a:spcPts val="600"/>
-              </a:spcAft>
-            </a:pPr>
-            <a:r>
-              <a:rPr sz="1500">
-                <a:solidFill>
-                  <a:srgbClr val="22282E"/>
-                </a:solidFill>
-              </a:rPr>
-              <a:t>•  ❓ ¿Necesito permiso para un simulacro interno?</a:t>
+              <a:t>•  Empareja cada principio de Cialdini con un ejemplo de correo o llamada.</a:t>
+            </a:r>
+          </a:p>
+          <a:p>
+            <a:pPr>
+              <a:spcAft>
+                <a:spcPts val="600"/>
+              </a:spcAft>
+            </a:pPr>
+            <a:r>
+              <a:rPr sz="1500">
+                <a:solidFill>
+                  <a:srgbClr val="22282E"/>
+                </a:solidFill>
+              </a:rPr>
+              <a:t>•  Explica la diferencia entre elicitación y interrogatorio.</a:t>
+            </a:r>
+          </a:p>
+          <a:p>
+            <a:pPr>
+              <a:spcAft>
+                <a:spcPts val="600"/>
+              </a:spcAft>
+            </a:pPr>
+            <a:r>
+              <a:rPr sz="1500">
+                <a:solidFill>
+                  <a:srgbClr val="22282E"/>
+                </a:solidFill>
+              </a:rPr>
+              <a:t>•  Analiza un correo de phishing real (recibido) e identifica sus palancas psicológicas.</a:t>
+            </a:r>
+          </a:p>
+          <a:p>
+            <a:pPr>
+              <a:spcAft>
+                <a:spcPts val="600"/>
+              </a:spcAft>
+            </a:pPr>
+            <a:r>
+              <a:rPr sz="1500">
+                <a:solidFill>
+                  <a:srgbClr val="22282E"/>
+                </a:solidFill>
+              </a:rPr>
+              <a:t>•  Redacta unas Rules of Engagement completas para un engagement ficticio.</a:t>
+            </a:r>
+          </a:p>
+          <a:p>
+            <a:pPr>
+              <a:spcAft>
+                <a:spcPts val="600"/>
+              </a:spcAft>
+            </a:pPr>
+            <a:r>
+              <a:rPr sz="1500">
+                <a:solidFill>
+                  <a:srgbClr val="22282E"/>
+                </a:solidFill>
+              </a:rPr>
+              <a:t>•  Diseña 3 métricas defensivas que midan resiliencia, no solo víctimas.</a:t>
+            </a:r>
+          </a:p>
+          <a:p>
+            <a:pPr>
+              <a:spcAft>
+                <a:spcPts val="600"/>
+              </a:spcAft>
+            </a:pPr>
+            <a:r>
+              <a:rPr sz="1500">
+                <a:solidFill>
+                  <a:srgbClr val="22282E"/>
+                </a:solidFill>
+              </a:rPr>
+              <a:t>•  Debate: ¿dónde está la línea entre un simulacro legítimo y una manipulación dañina?</a:t>
             </a:r>
           </a:p>
         </p:txBody>
@@ -3661,7 +3695,7 @@
                   <a:srgbClr val="0B3D2E"/>
                 </a:solidFill>
               </a:rPr>
-              <a:t>🔗 Referencias</a:t>
+              <a:t>📝 Reto verificable</a:t>
             </a:r>
           </a:p>
         </p:txBody>
@@ -3699,6 +3733,468 @@
                   <a:srgbClr val="22282E"/>
                 </a:solidFill>
               </a:rPr>
+              <a:t>•  Entrega un plan de simulacro de ingeniería social autorizado: objetivos, vectores, pretexto</a:t>
+            </a:r>
+          </a:p>
+          <a:p>
+            <a:pPr>
+              <a:spcAft>
+                <a:spcPts val="600"/>
+              </a:spcAft>
+            </a:pPr>
+            <a:r>
+              <a:rPr sz="1500">
+                <a:solidFill>
+                  <a:srgbClr val="22282E"/>
+                </a:solidFill>
+              </a:rPr>
+              <a:t>•  ético, Rules of Engagement, métricas defensivas y plan de escalado.</a:t>
+            </a:r>
+          </a:p>
+          <a:p>
+            <a:pPr>
+              <a:spcAft>
+                <a:spcPts val="600"/>
+              </a:spcAft>
+            </a:pPr>
+            <a:r>
+              <a:rPr sz="1500">
+                <a:solidFill>
+                  <a:srgbClr val="22282E"/>
+                </a:solidFill>
+              </a:rPr>
+              <a:t>•  Criterio de aceptación: el plan incluye autorización explícita, límites claros ("qué no se hará"),</a:t>
+            </a:r>
+          </a:p>
+          <a:p>
+            <a:pPr>
+              <a:spcAft>
+                <a:spcPts val="600"/>
+              </a:spcAft>
+            </a:pPr>
+            <a:r>
+              <a:rPr sz="1500">
+                <a:solidFill>
+                  <a:srgbClr val="22282E"/>
+                </a:solidFill>
+              </a:rPr>
+              <a:t>•  protección de las personas y métricas orientadas a mejorar la defensa.</a:t>
+            </a:r>
+          </a:p>
+        </p:txBody>
+      </p:sp>
+    </p:spTree>
+  </p:cSld>
+  <p:clrMapOvr>
+    <a:masterClrMapping/>
+  </p:clrMapOvr>
+</p:sld>
+</file>
+
+<file path=ppt/slides/slide14.xml><?xml version="1.0" encoding="utf-8"?>
+<p:sld xmlns:a="http://schemas.openxmlformats.org/drawingml/2006/main" xmlns:p="http://schemas.openxmlformats.org/presentationml/2006/main" xmlns:r="http://schemas.openxmlformats.org/officeDocument/2006/relationships">
+  <p:cSld>
+    <p:spTree>
+      <p:nvGrpSpPr>
+        <p:cNvPr id="1" name=""/>
+        <p:cNvGrpSpPr/>
+        <p:nvPr/>
+      </p:nvGrpSpPr>
+      <p:grpSpPr/>
+      <p:sp>
+        <p:nvSpPr>
+          <p:cNvPr id="2" name="TextBox 1"/>
+          <p:cNvSpPr txBox="1"/>
+          <p:nvPr/>
+        </p:nvSpPr>
+        <p:spPr>
+          <a:xfrm>
+            <a:off x="457200" y="320040"/>
+            <a:ext cx="8229600" cy="822960"/>
+          </a:xfrm>
+          <a:prstGeom prst="rect">
+            <a:avLst/>
+          </a:prstGeom>
+          <a:noFill/>
+        </p:spPr>
+        <p:txBody>
+          <a:bodyPr wrap="square">
+            <a:spAutoFit/>
+          </a:bodyPr>
+          <a:lstStyle/>
+          <a:p>
+            <a:r>
+              <a:rPr sz="2600" b="1">
+                <a:solidFill>
+                  <a:srgbClr val="0B3D2E"/>
+                </a:solidFill>
+              </a:rPr>
+              <a:t>⚠️ Errores comunes</a:t>
+            </a:r>
+          </a:p>
+        </p:txBody>
+      </p:sp>
+      <p:sp>
+        <p:nvSpPr>
+          <p:cNvPr id="3" name="TextBox 2"/>
+          <p:cNvSpPr txBox="1"/>
+          <p:nvPr/>
+        </p:nvSpPr>
+        <p:spPr>
+          <a:xfrm>
+            <a:off x="457200" y="1280160"/>
+            <a:ext cx="8229600" cy="4937760"/>
+          </a:xfrm>
+          <a:prstGeom prst="rect">
+            <a:avLst/>
+          </a:prstGeom>
+          <a:noFill/>
+        </p:spPr>
+        <p:txBody>
+          <a:bodyPr wrap="square">
+            <a:spAutoFit/>
+          </a:bodyPr>
+          <a:lstStyle/>
+          <a:p>
+            <a:pPr>
+              <a:spcAft>
+                <a:spcPts val="600"/>
+              </a:spcAft>
+            </a:pPr>
+            <a:r>
+              <a:rPr sz="1500">
+                <a:solidFill>
+                  <a:srgbClr val="22282E"/>
+                </a:solidFill>
+              </a:rPr>
+              <a:t>•  Simulacro percibido como "trampa" hostil — Faltó enfoque educativo. Diseña para enseñar, no para humillar.</a:t>
+            </a:r>
+          </a:p>
+          <a:p>
+            <a:pPr>
+              <a:spcAft>
+                <a:spcPts val="600"/>
+              </a:spcAft>
+            </a:pPr>
+            <a:r>
+              <a:rPr sz="1500">
+                <a:solidFill>
+                  <a:srgbClr val="22282E"/>
+                </a:solidFill>
+              </a:rPr>
+              <a:t>•  Sin autorización escrita — Riesgo legal grave. Nunca ejecutes sin permiso firmado.</a:t>
+            </a:r>
+          </a:p>
+          <a:p>
+            <a:pPr>
+              <a:spcAft>
+                <a:spcPts val="600"/>
+              </a:spcAft>
+            </a:pPr>
+            <a:r>
+              <a:rPr sz="1500">
+                <a:solidFill>
+                  <a:srgbClr val="22282E"/>
+                </a:solidFill>
+              </a:rPr>
+              <a:t>•  Métrica solo de "clics" — Mide resiliencia: tasa de reporte y tiempo de detección también.</a:t>
+            </a:r>
+          </a:p>
+          <a:p>
+            <a:pPr>
+              <a:spcAft>
+                <a:spcPts val="600"/>
+              </a:spcAft>
+            </a:pPr>
+            <a:r>
+              <a:rPr sz="1500">
+                <a:solidFill>
+                  <a:srgbClr val="22282E"/>
+                </a:solidFill>
+              </a:rPr>
+              <a:t>•  Pretexto con datos reales de terceros — Riesgo de privacidad. Usa datos ficticios en pruebas de concienciación.</a:t>
+            </a:r>
+          </a:p>
+          <a:p>
+            <a:pPr>
+              <a:spcAft>
+                <a:spcPts val="600"/>
+              </a:spcAft>
+            </a:pPr>
+            <a:r>
+              <a:rPr sz="1500">
+                <a:solidFill>
+                  <a:srgbClr val="22282E"/>
+                </a:solidFill>
+              </a:rPr>
+              <a:t>•  Personas dañadas emocionalmente — No hubo plan de cuidado. Incluye escalado y debrief de apoyo.</a:t>
+            </a:r>
+          </a:p>
+        </p:txBody>
+      </p:sp>
+    </p:spTree>
+  </p:cSld>
+  <p:clrMapOvr>
+    <a:masterClrMapping/>
+  </p:clrMapOvr>
+</p:sld>
+</file>
+
+<file path=ppt/slides/slide15.xml><?xml version="1.0" encoding="utf-8"?>
+<p:sld xmlns:a="http://schemas.openxmlformats.org/drawingml/2006/main" xmlns:p="http://schemas.openxmlformats.org/presentationml/2006/main" xmlns:r="http://schemas.openxmlformats.org/officeDocument/2006/relationships">
+  <p:cSld>
+    <p:spTree>
+      <p:nvGrpSpPr>
+        <p:cNvPr id="1" name=""/>
+        <p:cNvGrpSpPr/>
+        <p:nvPr/>
+      </p:nvGrpSpPr>
+      <p:grpSpPr/>
+      <p:sp>
+        <p:nvSpPr>
+          <p:cNvPr id="2" name="TextBox 1"/>
+          <p:cNvSpPr txBox="1"/>
+          <p:nvPr/>
+        </p:nvSpPr>
+        <p:spPr>
+          <a:xfrm>
+            <a:off x="457200" y="320040"/>
+            <a:ext cx="8229600" cy="822960"/>
+          </a:xfrm>
+          <a:prstGeom prst="rect">
+            <a:avLst/>
+          </a:prstGeom>
+          <a:noFill/>
+        </p:spPr>
+        <p:txBody>
+          <a:bodyPr wrap="square">
+            <a:spAutoFit/>
+          </a:bodyPr>
+          <a:lstStyle/>
+          <a:p>
+            <a:r>
+              <a:rPr sz="2600" b="1">
+                <a:solidFill>
+                  <a:srgbClr val="0B3D2E"/>
+                </a:solidFill>
+              </a:rPr>
+              <a:t>❓ Preguntas frecuentes</a:t>
+            </a:r>
+          </a:p>
+        </p:txBody>
+      </p:sp>
+      <p:sp>
+        <p:nvSpPr>
+          <p:cNvPr id="3" name="TextBox 2"/>
+          <p:cNvSpPr txBox="1"/>
+          <p:nvPr/>
+        </p:nvSpPr>
+        <p:spPr>
+          <a:xfrm>
+            <a:off x="457200" y="1280160"/>
+            <a:ext cx="8229600" cy="4937760"/>
+          </a:xfrm>
+          <a:prstGeom prst="rect">
+            <a:avLst/>
+          </a:prstGeom>
+          <a:noFill/>
+        </p:spPr>
+        <p:txBody>
+          <a:bodyPr wrap="square">
+            <a:spAutoFit/>
+          </a:bodyPr>
+          <a:lstStyle/>
+          <a:p>
+            <a:pPr>
+              <a:spcAft>
+                <a:spcPts val="600"/>
+              </a:spcAft>
+            </a:pPr>
+            <a:r>
+              <a:rPr sz="1500">
+                <a:solidFill>
+                  <a:srgbClr val="22282E"/>
+                </a:solidFill>
+              </a:rPr>
+              <a:t>•  ❓ ¿La ingeniería social es "hacking"?</a:t>
+            </a:r>
+          </a:p>
+          <a:p>
+            <a:pPr>
+              <a:spcAft>
+                <a:spcPts val="600"/>
+              </a:spcAft>
+            </a:pPr>
+            <a:r>
+              <a:rPr sz="1500">
+                <a:solidFill>
+                  <a:srgbClr val="22282E"/>
+                </a:solidFill>
+              </a:rPr>
+              <a:t>•  Sí, es hacking del factor humano. No requiere exploits técnicos; explota psicología, y suele ser el</a:t>
+            </a:r>
+          </a:p>
+          <a:p>
+            <a:pPr>
+              <a:spcAft>
+                <a:spcPts val="600"/>
+              </a:spcAft>
+            </a:pPr>
+            <a:r>
+              <a:rPr sz="1500">
+                <a:solidFill>
+                  <a:srgbClr val="22282E"/>
+                </a:solidFill>
+              </a:rPr>
+              <a:t>•  camino más fácil al objetivo.</a:t>
+            </a:r>
+          </a:p>
+          <a:p>
+            <a:pPr>
+              <a:spcAft>
+                <a:spcPts val="600"/>
+              </a:spcAft>
+            </a:pPr>
+            <a:r>
+              <a:rPr sz="1500">
+                <a:solidFill>
+                  <a:srgbClr val="22282E"/>
+                </a:solidFill>
+              </a:rPr>
+              <a:t>•  ❓ ¿Por qué caen incluso personas técnicas?</a:t>
+            </a:r>
+          </a:p>
+          <a:p>
+            <a:pPr>
+              <a:spcAft>
+                <a:spcPts val="600"/>
+              </a:spcAft>
+            </a:pPr>
+            <a:r>
+              <a:rPr sz="1500">
+                <a:solidFill>
+                  <a:srgbClr val="22282E"/>
+                </a:solidFill>
+              </a:rPr>
+              <a:t>•  Porque los principios de influencia operan bajo el pensamiento rápido y emocional; el conocimiento</a:t>
+            </a:r>
+          </a:p>
+          <a:p>
+            <a:pPr>
+              <a:spcAft>
+                <a:spcPts val="600"/>
+              </a:spcAft>
+            </a:pPr>
+            <a:r>
+              <a:rPr sz="1500">
+                <a:solidFill>
+                  <a:srgbClr val="22282E"/>
+                </a:solidFill>
+              </a:rPr>
+              <a:t>•  técnico no inmuniza contra la urgencia o la autoridad.</a:t>
+            </a:r>
+          </a:p>
+          <a:p>
+            <a:pPr>
+              <a:spcAft>
+                <a:spcPts val="600"/>
+              </a:spcAft>
+            </a:pPr>
+            <a:r>
+              <a:rPr sz="1500">
+                <a:solidFill>
+                  <a:srgbClr val="22282E"/>
+                </a:solidFill>
+              </a:rPr>
+              <a:t>•  ❓ ¿Necesito permiso para un simulacro interno?</a:t>
+            </a:r>
+          </a:p>
+        </p:txBody>
+      </p:sp>
+    </p:spTree>
+  </p:cSld>
+  <p:clrMapOvr>
+    <a:masterClrMapping/>
+  </p:clrMapOvr>
+</p:sld>
+</file>
+
+<file path=ppt/slides/slide16.xml><?xml version="1.0" encoding="utf-8"?>
+<p:sld xmlns:a="http://schemas.openxmlformats.org/drawingml/2006/main" xmlns:p="http://schemas.openxmlformats.org/presentationml/2006/main" xmlns:r="http://schemas.openxmlformats.org/officeDocument/2006/relationships">
+  <p:cSld>
+    <p:spTree>
+      <p:nvGrpSpPr>
+        <p:cNvPr id="1" name=""/>
+        <p:cNvGrpSpPr/>
+        <p:nvPr/>
+      </p:nvGrpSpPr>
+      <p:grpSpPr/>
+      <p:sp>
+        <p:nvSpPr>
+          <p:cNvPr id="2" name="TextBox 1"/>
+          <p:cNvSpPr txBox="1"/>
+          <p:nvPr/>
+        </p:nvSpPr>
+        <p:spPr>
+          <a:xfrm>
+            <a:off x="457200" y="320040"/>
+            <a:ext cx="8229600" cy="822960"/>
+          </a:xfrm>
+          <a:prstGeom prst="rect">
+            <a:avLst/>
+          </a:prstGeom>
+          <a:noFill/>
+        </p:spPr>
+        <p:txBody>
+          <a:bodyPr wrap="square">
+            <a:spAutoFit/>
+          </a:bodyPr>
+          <a:lstStyle/>
+          <a:p>
+            <a:r>
+              <a:rPr sz="2600" b="1">
+                <a:solidFill>
+                  <a:srgbClr val="0B3D2E"/>
+                </a:solidFill>
+              </a:rPr>
+              <a:t>🔗 Referencias</a:t>
+            </a:r>
+          </a:p>
+        </p:txBody>
+      </p:sp>
+      <p:sp>
+        <p:nvSpPr>
+          <p:cNvPr id="3" name="TextBox 2"/>
+          <p:cNvSpPr txBox="1"/>
+          <p:nvPr/>
+        </p:nvSpPr>
+        <p:spPr>
+          <a:xfrm>
+            <a:off x="457200" y="1280160"/>
+            <a:ext cx="8229600" cy="4937760"/>
+          </a:xfrm>
+          <a:prstGeom prst="rect">
+            <a:avLst/>
+          </a:prstGeom>
+          <a:noFill/>
+        </p:spPr>
+        <p:txBody>
+          <a:bodyPr wrap="square">
+            <a:spAutoFit/>
+          </a:bodyPr>
+          <a:lstStyle/>
+          <a:p>
+            <a:pPr>
+              <a:spcAft>
+                <a:spcPts val="600"/>
+              </a:spcAft>
+            </a:pPr>
+            <a:r>
+              <a:rPr sz="1500">
+                <a:solidFill>
+                  <a:srgbClr val="22282E"/>
+                </a:solidFill>
+              </a:rPr>
               <a:t>•  Hadnagy, C. Social Engineering: The Science of Human Hacking. Wiley.</a:t>
             </a:r>
           </a:p>
@@ -3764,6 +4260,81 @@
           </a:p>
         </p:txBody>
       </p:sp>
+    </p:spTree>
+  </p:cSld>
+  <p:clrMapOvr>
+    <a:masterClrMapping/>
+  </p:clrMapOvr>
+</p:sld>
+</file>
+
+<file path=ppt/slides/slide17.xml><?xml version="1.0" encoding="utf-8"?>
+<p:sld xmlns:a="http://schemas.openxmlformats.org/drawingml/2006/main" xmlns:p="http://schemas.openxmlformats.org/presentationml/2006/main" xmlns:r="http://schemas.openxmlformats.org/officeDocument/2006/relationships">
+  <p:cSld>
+    <p:spTree>
+      <p:nvGrpSpPr>
+        <p:cNvPr id="1" name=""/>
+        <p:cNvGrpSpPr/>
+        <p:nvPr/>
+      </p:nvGrpSpPr>
+      <p:grpSpPr/>
+      <p:sp>
+        <p:nvSpPr>
+          <p:cNvPr id="2" name="TextBox 1"/>
+          <p:cNvSpPr txBox="1"/>
+          <p:nvPr/>
+        </p:nvSpPr>
+        <p:spPr>
+          <a:xfrm>
+            <a:off x="457200" y="274320"/>
+            <a:ext cx="8229600" cy="640080"/>
+          </a:xfrm>
+          <a:prstGeom prst="rect">
+            <a:avLst/>
+          </a:prstGeom>
+          <a:noFill/>
+        </p:spPr>
+        <p:txBody>
+          <a:bodyPr wrap="square">
+            <a:spAutoFit/>
+          </a:bodyPr>
+          <a:lstStyle/>
+          <a:p>
+            <a:r>
+              <a:rPr sz="2200" b="1">
+                <a:solidFill>
+                  <a:srgbClr val="0B3D2E"/>
+                </a:solidFill>
+              </a:rPr>
+              <a:t>Diagrama de la clase</a:t>
+            </a:r>
+          </a:p>
+        </p:txBody>
+      </p:sp>
+      <p:pic>
+        <p:nvPicPr>
+          <p:cNvPr id="3" name="Picture 2" descr="cb11943b1cb3515f.png"/>
+          <p:cNvPicPr>
+            <a:picLocks noChangeAspect="1"/>
+          </p:cNvPicPr>
+          <p:nvPr/>
+        </p:nvPicPr>
+        <p:blipFill>
+          <a:blip r:embed="rId2"/>
+          <a:stretch>
+            <a:fillRect/>
+          </a:stretch>
+        </p:blipFill>
+        <p:spPr>
+          <a:xfrm>
+            <a:off x="457200" y="2697480"/>
+            <a:ext cx="8229600" cy="2103120"/>
+          </a:xfrm>
+          <a:prstGeom prst="rect">
+            <a:avLst/>
+          </a:prstGeom>
+        </p:spPr>
+      </p:pic>
     </p:spTree>
   </p:cSld>
   <p:clrMapOvr>
@@ -4421,7 +4992,7 @@
                   <a:srgbClr val="0B3D2E"/>
                 </a:solidFill>
               </a:rPr>
-              <a:t>📖 Definiciones y características</a:t>
+              <a:t>🧠 Explicación en profundidad</a:t>
             </a:r>
           </a:p>
         </p:txBody>
@@ -4459,97 +5030,67 @@
                   <a:srgbClr val="22282E"/>
                 </a:solidFill>
               </a:rPr>
-              <a:t>•  Ingeniería social: manipulación de personas para que realicen acciones o revelen información. Característica: explota confianza y emoción, no fallos técnicos.</a:t>
-            </a:r>
-          </a:p>
-          <a:p>
-            <a:pPr>
-              <a:spcAft>
-                <a:spcPts val="600"/>
-              </a:spcAft>
-            </a:pPr>
-            <a:r>
-              <a:rPr sz="1500">
-                <a:solidFill>
-                  <a:srgbClr val="22282E"/>
-                </a:solidFill>
-              </a:rPr>
-              <a:t>•  Principio de autoridad: tendemos a obedecer a figuras de autoridad. Característica: el pretexto "soy de IT/dirección" es potente.</a:t>
-            </a:r>
-          </a:p>
-          <a:p>
-            <a:pPr>
-              <a:spcAft>
-                <a:spcPts val="600"/>
-              </a:spcAft>
-            </a:pPr>
-            <a:r>
-              <a:rPr sz="1500">
-                <a:solidFill>
-                  <a:srgbClr val="22282E"/>
-                </a:solidFill>
-              </a:rPr>
-              <a:t>•  Prueba social: hacemos lo que hacen los demás. Característica: "todos ya lo hicieron" reduce resistencia.</a:t>
-            </a:r>
-          </a:p>
-          <a:p>
-            <a:pPr>
-              <a:spcAft>
-                <a:spcPts val="600"/>
-              </a:spcAft>
-            </a:pPr>
-            <a:r>
-              <a:rPr sz="1500">
-                <a:solidFill>
-                  <a:srgbClr val="22282E"/>
-                </a:solidFill>
-              </a:rPr>
-              <a:t>•  Escasez/urgencia: valoramos lo escaso y actuamos ante la premura. Característica: acorta el pensamiento crítico.</a:t>
-            </a:r>
-          </a:p>
-          <a:p>
-            <a:pPr>
-              <a:spcAft>
-                <a:spcPts val="600"/>
-              </a:spcAft>
-            </a:pPr>
-            <a:r>
-              <a:rPr sz="1500">
-                <a:solidFill>
-                  <a:srgbClr val="22282E"/>
-                </a:solidFill>
-              </a:rPr>
-              <a:t>•  Reciprocidad: devolvemos favores. Característica: un pequeño gesto previo abre la puerta.</a:t>
-            </a:r>
-          </a:p>
-          <a:p>
-            <a:pPr>
-              <a:spcAft>
-                <a:spcPts val="600"/>
-              </a:spcAft>
-            </a:pPr>
-            <a:r>
-              <a:rPr sz="1500">
-                <a:solidFill>
-                  <a:srgbClr val="22282E"/>
-                </a:solidFill>
-              </a:rPr>
-              <a:t>•  Pretexto: historia falsa creíble que justifica la petición. Característica: se nutre del OSINT previo.</a:t>
-            </a:r>
-          </a:p>
-          <a:p>
-            <a:pPr>
-              <a:spcAft>
-                <a:spcPts val="600"/>
-              </a:spcAft>
-            </a:pPr>
-            <a:r>
-              <a:rPr sz="1500">
-                <a:solidFill>
-                  <a:srgbClr val="22282E"/>
-                </a:solidFill>
-              </a:rPr>
-              <a:t>•  Elicitación: obtener información sin preguntarla directamente. Característica: conversación aparentemente inocua.</a:t>
+              <a:t>•  Una persona decide con información incompleta, presión temporal, normas de ayuda y señales de autoridad. Un atacante diseña el contexto para que una acción peligrosa parezca coherente: pagar una…</a:t>
+            </a:r>
+          </a:p>
+          <a:p>
+            <a:pPr>
+              <a:spcAft>
+                <a:spcPts val="600"/>
+              </a:spcAft>
+            </a:pPr>
+            <a:r>
+              <a:rPr sz="1500">
+                <a:solidFill>
+                  <a:srgbClr val="22282E"/>
+                </a:solidFill>
+              </a:rPr>
+              <a:t>•  El diagrama muestra que la defensa no depende solo de «reconocer señales». Inserta verificación independiente antes de una acción irreversible y facilita detenerse sin castigo. Una llamada que conoce…</a:t>
+            </a:r>
+          </a:p>
+          <a:p>
+            <a:pPr>
+              <a:spcAft>
+                <a:spcPts val="600"/>
+              </a:spcAft>
+            </a:pPr>
+            <a:r>
+              <a:rPr sz="1500">
+                <a:solidFill>
+                  <a:srgbClr val="22282E"/>
+                </a:solidFill>
+              </a:rPr>
+              <a:t>•  Autoridad, urgencia, reciprocidad, consistencia, afinidad y prueba social ayudan a analizar mensajes, pero no son botones universales ni explican por completo la conducta. El resultado depende de…</a:t>
+            </a:r>
+          </a:p>
+          <a:p>
+            <a:pPr>
+              <a:spcAft>
+                <a:spcPts val="600"/>
+              </a:spcAft>
+            </a:pPr>
+            <a:r>
+              <a:rPr sz="1500">
+                <a:solidFill>
+                  <a:srgbClr val="22282E"/>
+                </a:solidFill>
+              </a:rPr>
+              <a:t>•  Una simulación autorizada define propósito, población, aprobaciones, datos recolectados, soporte, exclusiones y parada de emergencia. No solicita contraseñas reales, no usa temas traumáticos, salud…</a:t>
+            </a:r>
+          </a:p>
+          <a:p>
+            <a:pPr>
+              <a:spcAft>
+                <a:spcPts val="600"/>
+              </a:spcAft>
+            </a:pPr>
+            <a:r>
+              <a:rPr sz="1500">
+                <a:solidFill>
+                  <a:srgbClr val="22282E"/>
+                </a:solidFill>
+              </a:rPr>
+              <a:t>•  Un correo auténtico de un proveedor comprometido solicita cambiar la cuenta de pago. No contiene faltas ni dominio parecido; la formación basada en «buscar errores» falla. El control efectivo es…</a:t>
             </a:r>
           </a:p>
         </p:txBody>
@@ -4600,7 +5141,7 @@
                   <a:srgbClr val="0B3D2E"/>
                 </a:solidFill>
               </a:rPr>
-              <a:t>🧰 Herramientas y preparación</a:t>
+              <a:t>📔 Glosario operativo</a:t>
             </a:r>
           </a:p>
         </p:txBody>
@@ -4638,67 +5179,82 @@
                   <a:srgbClr val="22282E"/>
                 </a:solidFill>
               </a:rPr>
-              <a:t>•  Marco documental: plantilla de Rules of Engagement (alcance, objetivos, límites, escalado) y autorización firmada.</a:t>
-            </a:r>
-          </a:p>
-          <a:p>
-            <a:pPr>
-              <a:spcAft>
-                <a:spcPts val="600"/>
-              </a:spcAft>
-            </a:pPr>
-            <a:r>
-              <a:rPr sz="1500">
-                <a:solidFill>
-                  <a:srgbClr val="22282E"/>
-                </a:solidFill>
-              </a:rPr>
-              <a:t>•  Fuentes de estudio: libros de Hadnagy y Cialdini (referencia, no copia); casos públicos de la SECBAG/DEF CON SECTF.</a:t>
-            </a:r>
-          </a:p>
-          <a:p>
-            <a:pPr>
-              <a:spcAft>
-                <a:spcPts val="600"/>
-              </a:spcAft>
-            </a:pPr>
-            <a:r>
-              <a:rPr sz="1500">
-                <a:solidFill>
-                  <a:srgbClr val="22282E"/>
-                </a:solidFill>
-              </a:rPr>
-              <a:t>•  Registro: diario de operación para documentar cada interacción de un simulacro autorizado.</a:t>
-            </a:r>
-          </a:p>
-          <a:p>
-            <a:pPr>
-              <a:spcAft>
-                <a:spcPts val="600"/>
-              </a:spcAft>
-            </a:pPr>
-            <a:r>
-              <a:rPr sz="1500">
-                <a:solidFill>
-                  <a:srgbClr val="22282E"/>
-                </a:solidFill>
-              </a:rPr>
-              <a:t>•  Este es un módulo conceptual: la práctica ofensiva real llega en 257–258, siempre autorizada.</a:t>
-            </a:r>
-          </a:p>
-          <a:p>
-            <a:pPr>
-              <a:spcAft>
-                <a:spcPts val="600"/>
-              </a:spcAft>
-            </a:pPr>
-            <a:r>
-              <a:rPr sz="1500">
-                <a:solidFill>
-                  <a:srgbClr val="22282E"/>
-                </a:solidFill>
-              </a:rPr>
-              <a:t>•  Recordatorio: sin permiso escrito no hay ejercicio ofensivo; aquí se estudia y se planifica.</a:t>
+              <a:t>•  Término — Definición útil</a:t>
+            </a:r>
+          </a:p>
+          <a:p>
+            <a:pPr>
+              <a:spcAft>
+                <a:spcPts val="600"/>
+              </a:spcAft>
+            </a:pPr>
+            <a:r>
+              <a:rPr sz="1500">
+                <a:solidFill>
+                  <a:srgbClr val="22282E"/>
+                </a:solidFill>
+              </a:rPr>
+              <a:t>•  Pretexto — Historia diseñada para justificar identidad, urgencia y solicitud.</a:t>
+            </a:r>
+          </a:p>
+          <a:p>
+            <a:pPr>
+              <a:spcAft>
+                <a:spcPts val="600"/>
+              </a:spcAft>
+            </a:pPr>
+            <a:r>
+              <a:rPr sz="1500">
+                <a:solidFill>
+                  <a:srgbClr val="22282E"/>
+                </a:solidFill>
+              </a:rPr>
+              <a:t>•  Canal independiente — Medio de verificación no proporcionado por la propia solicitud.</a:t>
+            </a:r>
+          </a:p>
+          <a:p>
+            <a:pPr>
+              <a:spcAft>
+                <a:spcPts val="600"/>
+              </a:spcAft>
+            </a:pPr>
+            <a:r>
+              <a:rPr sz="1500">
+                <a:solidFill>
+                  <a:srgbClr val="22282E"/>
+                </a:solidFill>
+              </a:rPr>
+              <a:t>•  BEC — Compromiso o suplantación de correo para inducir acciones de negocio.</a:t>
+            </a:r>
+          </a:p>
+          <a:p>
+            <a:pPr>
+              <a:spcAft>
+                <a:spcPts val="600"/>
+              </a:spcAft>
+            </a:pPr>
+            <a:r>
+              <a:rPr sz="1500">
+                <a:solidFill>
+                  <a:srgbClr val="22282E"/>
+                </a:solidFill>
+              </a:rPr>
+              <a:t>•  Simulación — Ejercicio autorizado con objetivos, límites y protección de participantes.</a:t>
+            </a:r>
+          </a:p>
+          <a:p>
+            <a:pPr>
+              <a:spcAft>
+                <a:spcPts val="600"/>
+              </a:spcAft>
+            </a:pPr>
+            <a:r>
+              <a:rPr sz="1500">
+                <a:solidFill>
+                  <a:srgbClr val="22282E"/>
+                </a:solidFill>
+              </a:rPr>
+              <a:t>•  Culpa a la víctima — Enfoque que atribuye el fallo a la persona e ignora controles del sistema.</a:t>
             </a:r>
           </a:p>
         </p:txBody>
@@ -4749,7 +5305,7 @@
                   <a:srgbClr val="0B3D2E"/>
                 </a:solidFill>
               </a:rPr>
-              <a:t>🧪 Laboratorio guiado (ejercicio aplicado)</a:t>
+              <a:t>✅ Criterio de dominio</a:t>
             </a:r>
           </a:p>
         </p:txBody>
@@ -4787,97 +5343,7 @@
                   <a:srgbClr val="22282E"/>
                 </a:solidFill>
               </a:rPr>
-              <a:t>•  Análisis de casos y diseño de un marco ético, sin manipular a nadie.</a:t>
-            </a:r>
-          </a:p>
-          <a:p>
-            <a:pPr>
-              <a:spcAft>
-                <a:spcPts val="600"/>
-              </a:spcAft>
-            </a:pPr>
-            <a:r>
-              <a:rPr sz="1500">
-                <a:solidFill>
-                  <a:srgbClr val="22282E"/>
-                </a:solidFill>
-              </a:rPr>
-              <a:t>•  Toma tres casos públicos de ingeniería social (p. ej. incidentes divulgados) y clasifica su vector.</a:t>
-            </a:r>
-          </a:p>
-          <a:p>
-            <a:pPr>
-              <a:spcAft>
-                <a:spcPts val="600"/>
-              </a:spcAft>
-            </a:pPr>
-            <a:r>
-              <a:rPr sz="1500">
-                <a:solidFill>
-                  <a:srgbClr val="22282E"/>
-                </a:solidFill>
-              </a:rPr>
-              <a:t>•  Para cada caso, identifica qué principios de Cialdini se explotaron y subráyalos.</a:t>
-            </a:r>
-          </a:p>
-          <a:p>
-            <a:pPr>
-              <a:spcAft>
-                <a:spcPts val="600"/>
-              </a:spcAft>
-            </a:pPr>
-            <a:r>
-              <a:rPr sz="1500">
-                <a:solidFill>
-                  <a:srgbClr val="22282E"/>
-                </a:solidFill>
-              </a:rPr>
-              <a:t>•  Reconstruye el ciclo de ataque: qué OSINT tuvieron, qué pretexto usaron, cómo ejecutaron y salieron.</a:t>
-            </a:r>
-          </a:p>
-          <a:p>
-            <a:pPr>
-              <a:spcAft>
-                <a:spcPts val="600"/>
-              </a:spcAft>
-            </a:pPr>
-            <a:r>
-              <a:rPr sz="1500">
-                <a:solidFill>
-                  <a:srgbClr val="22282E"/>
-                </a:solidFill>
-              </a:rPr>
-              <a:t>•  Redacta una plantilla de Rules of Engagement para un simulacro autorizado (alcance, límites, no-hacer).</a:t>
-            </a:r>
-          </a:p>
-          <a:p>
-            <a:pPr>
-              <a:spcAft>
-                <a:spcPts val="600"/>
-              </a:spcAft>
-            </a:pPr>
-            <a:r>
-              <a:rPr sz="1500">
-                <a:solidFill>
-                  <a:srgbClr val="22282E"/>
-                </a:solidFill>
-              </a:rPr>
-              <a:t>•  Diseña un pretexto ético de laboratorio para probar concienciación (sin datos reales de terceros).</a:t>
-            </a:r>
-          </a:p>
-          <a:p>
-            <a:pPr>
-              <a:spcAft>
-                <a:spcPts val="600"/>
-              </a:spcAft>
-            </a:pPr>
-            <a:r>
-              <a:rPr sz="1500">
-                <a:solidFill>
-                  <a:srgbClr val="22282E"/>
-                </a:solidFill>
-              </a:rPr>
-              <a:t>•  Define métricas de éxito defensivas: tasa de reporte, tiempo de detección, no solo "cuántos cayeron".</a:t>
+              <a:t>•  Existe dominio cuando el alumno descompone un escenario en contexto, señales, acción e impacto; diseña controles técnicos y de proceso; y propone una simulación que mide aprendizaje sin capturar…</a:t>
             </a:r>
           </a:p>
         </p:txBody>
@@ -4928,7 +5394,7 @@
                   <a:srgbClr val="0B3D2E"/>
                 </a:solidFill>
               </a:rPr>
-              <a:t>✍️ Ejercicios</a:t>
+              <a:t>📖 Definiciones y características</a:t>
             </a:r>
           </a:p>
         </p:txBody>
@@ -4966,82 +5432,97 @@
                   <a:srgbClr val="22282E"/>
                 </a:solidFill>
               </a:rPr>
-              <a:t>•  Empareja cada principio de Cialdini con un ejemplo de correo o llamada.</a:t>
-            </a:r>
-          </a:p>
-          <a:p>
-            <a:pPr>
-              <a:spcAft>
-                <a:spcPts val="600"/>
-              </a:spcAft>
-            </a:pPr>
-            <a:r>
-              <a:rPr sz="1500">
-                <a:solidFill>
-                  <a:srgbClr val="22282E"/>
-                </a:solidFill>
-              </a:rPr>
-              <a:t>•  Explica la diferencia entre elicitación y interrogatorio.</a:t>
-            </a:r>
-          </a:p>
-          <a:p>
-            <a:pPr>
-              <a:spcAft>
-                <a:spcPts val="600"/>
-              </a:spcAft>
-            </a:pPr>
-            <a:r>
-              <a:rPr sz="1500">
-                <a:solidFill>
-                  <a:srgbClr val="22282E"/>
-                </a:solidFill>
-              </a:rPr>
-              <a:t>•  Analiza un correo de phishing real (recibido) e identifica sus palancas psicológicas.</a:t>
-            </a:r>
-          </a:p>
-          <a:p>
-            <a:pPr>
-              <a:spcAft>
-                <a:spcPts val="600"/>
-              </a:spcAft>
-            </a:pPr>
-            <a:r>
-              <a:rPr sz="1500">
-                <a:solidFill>
-                  <a:srgbClr val="22282E"/>
-                </a:solidFill>
-              </a:rPr>
-              <a:t>•  Redacta unas Rules of Engagement completas para un engagement ficticio.</a:t>
-            </a:r>
-          </a:p>
-          <a:p>
-            <a:pPr>
-              <a:spcAft>
-                <a:spcPts val="600"/>
-              </a:spcAft>
-            </a:pPr>
-            <a:r>
-              <a:rPr sz="1500">
-                <a:solidFill>
-                  <a:srgbClr val="22282E"/>
-                </a:solidFill>
-              </a:rPr>
-              <a:t>•  Diseña 3 métricas defensivas que midan resiliencia, no solo víctimas.</a:t>
-            </a:r>
-          </a:p>
-          <a:p>
-            <a:pPr>
-              <a:spcAft>
-                <a:spcPts val="600"/>
-              </a:spcAft>
-            </a:pPr>
-            <a:r>
-              <a:rPr sz="1500">
-                <a:solidFill>
-                  <a:srgbClr val="22282E"/>
-                </a:solidFill>
-              </a:rPr>
-              <a:t>•  Debate: ¿dónde está la línea entre un simulacro legítimo y una manipulación dañina?</a:t>
+              <a:t>•  Ingeniería social: manipulación de personas para que realicen acciones o revelen información. Característica: explota confianza y emoción, no fallos técnicos.</a:t>
+            </a:r>
+          </a:p>
+          <a:p>
+            <a:pPr>
+              <a:spcAft>
+                <a:spcPts val="600"/>
+              </a:spcAft>
+            </a:pPr>
+            <a:r>
+              <a:rPr sz="1500">
+                <a:solidFill>
+                  <a:srgbClr val="22282E"/>
+                </a:solidFill>
+              </a:rPr>
+              <a:t>•  Principio de autoridad: tendemos a obedecer a figuras de autoridad. Característica: el pretexto "soy de IT/dirección" es potente.</a:t>
+            </a:r>
+          </a:p>
+          <a:p>
+            <a:pPr>
+              <a:spcAft>
+                <a:spcPts val="600"/>
+              </a:spcAft>
+            </a:pPr>
+            <a:r>
+              <a:rPr sz="1500">
+                <a:solidFill>
+                  <a:srgbClr val="22282E"/>
+                </a:solidFill>
+              </a:rPr>
+              <a:t>•  Prueba social: hacemos lo que hacen los demás. Característica: "todos ya lo hicieron" reduce resistencia.</a:t>
+            </a:r>
+          </a:p>
+          <a:p>
+            <a:pPr>
+              <a:spcAft>
+                <a:spcPts val="600"/>
+              </a:spcAft>
+            </a:pPr>
+            <a:r>
+              <a:rPr sz="1500">
+                <a:solidFill>
+                  <a:srgbClr val="22282E"/>
+                </a:solidFill>
+              </a:rPr>
+              <a:t>•  Escasez/urgencia: valoramos lo escaso y actuamos ante la premura. Característica: acorta el pensamiento crítico.</a:t>
+            </a:r>
+          </a:p>
+          <a:p>
+            <a:pPr>
+              <a:spcAft>
+                <a:spcPts val="600"/>
+              </a:spcAft>
+            </a:pPr>
+            <a:r>
+              <a:rPr sz="1500">
+                <a:solidFill>
+                  <a:srgbClr val="22282E"/>
+                </a:solidFill>
+              </a:rPr>
+              <a:t>•  Reciprocidad: devolvemos favores. Característica: un pequeño gesto previo abre la puerta.</a:t>
+            </a:r>
+          </a:p>
+          <a:p>
+            <a:pPr>
+              <a:spcAft>
+                <a:spcPts val="600"/>
+              </a:spcAft>
+            </a:pPr>
+            <a:r>
+              <a:rPr sz="1500">
+                <a:solidFill>
+                  <a:srgbClr val="22282E"/>
+                </a:solidFill>
+              </a:rPr>
+              <a:t>•  Pretexto: historia falsa creíble que justifica la petición. Característica: se nutre del OSINT previo.</a:t>
+            </a:r>
+          </a:p>
+          <a:p>
+            <a:pPr>
+              <a:spcAft>
+                <a:spcPts val="600"/>
+              </a:spcAft>
+            </a:pPr>
+            <a:r>
+              <a:rPr sz="1500">
+                <a:solidFill>
+                  <a:srgbClr val="22282E"/>
+                </a:solidFill>
+              </a:rPr>
+              <a:t>•  Elicitación: obtener información sin preguntarla directamente. Característica: conversación aparentemente inocua.</a:t>
             </a:r>
           </a:p>
         </p:txBody>
